--- a/Cortex-Atlas-One-Pager.pptx
+++ b/Cortex-Atlas-One-Pager.pptx
@@ -4438,7 +4438,7 @@
                 </a:solidFill>
                 <a:latin typeface="Calibri"/>
               </a:rPr>
-              <a:t>combined role-gated form; duplicate-buy detection at intake.</a:t>
+              <a:t>status-driven, role-gated form; duplicate-buy detection (AI) at intake.</a:t>
             </a:r>
           </a:p>
           <a:p>
@@ -4762,7 +4762,7 @@
                 </a:solidFill>
                 <a:latin typeface="Calibri"/>
               </a:rPr>
-              <a:t>cross-tool signals, vendor value, Ask Atlas.</a:t>
+              <a:t>cross-tool signals, vendor value, dashboards &amp; Ask Atlas (AI).</a:t>
             </a:r>
           </a:p>
         </p:txBody>
